--- a/presentation/0709_1_Introduction.pptx
+++ b/presentation/0709_1_Introduction.pptx
@@ -221,7 +221,7 @@
           <a:p>
             <a:fld id="{B52B40C2-3351-40A2-B46D-4B4F877A79B2}" type="datetimeFigureOut">
               <a:rPr lang="ko-KR" altLang="en-US" smtClean="0"/>
-              <a:t>2026-07-27</a:t>
+              <a:t>2026-07-29</a:t>
             </a:fld>
             <a:endParaRPr lang="ko-KR" altLang="en-US"/>
           </a:p>
@@ -659,7 +659,7 @@
             <a:fld id="{2ADF637E-82D6-4563-BCF0-C9101F2B5148}" type="datetime1">
               <a:rPr lang="ko-KR" altLang="en-US" smtClean="0"/>
               <a:pPr/>
-              <a:t>2026-07-27</a:t>
+              <a:t>2026-07-29</a:t>
             </a:fld>
             <a:endParaRPr lang="ko-KR" altLang="en-US"/>
           </a:p>
@@ -872,7 +872,7 @@
           <a:p>
             <a:fld id="{C9178607-39E6-4CB2-B3CB-AB428B3B6195}" type="datetime1">
               <a:rPr lang="ko-KR" altLang="en-US" smtClean="0"/>
-              <a:t>2026-07-27</a:t>
+              <a:t>2026-07-29</a:t>
             </a:fld>
             <a:endParaRPr lang="ko-KR" altLang="en-US"/>
           </a:p>
@@ -1080,7 +1080,7 @@
           <a:p>
             <a:fld id="{F578A2F2-325F-46A6-8956-F2A49A35BAF8}" type="datetime1">
               <a:rPr lang="ko-KR" altLang="en-US" smtClean="0"/>
-              <a:t>2026-07-27</a:t>
+              <a:t>2026-07-29</a:t>
             </a:fld>
             <a:endParaRPr lang="ko-KR" altLang="en-US"/>
           </a:p>
@@ -1353,7 +1353,7 @@
             <a:fld id="{D58CD677-7AD2-4A27-94BD-C65458D22428}" type="datetime1">
               <a:rPr lang="ko-KR" altLang="en-US" smtClean="0"/>
               <a:pPr/>
-              <a:t>2026-07-27</a:t>
+              <a:t>2026-07-29</a:t>
             </a:fld>
             <a:endParaRPr lang="ko-KR" altLang="en-US"/>
           </a:p>
@@ -1696,7 +1696,7 @@
           <a:p>
             <a:fld id="{2BEF52EC-B397-4D0A-AE91-E0D6840C85A1}" type="datetime1">
               <a:rPr lang="ko-KR" altLang="en-US" smtClean="0"/>
-              <a:t>2026-07-27</a:t>
+              <a:t>2026-07-29</a:t>
             </a:fld>
             <a:endParaRPr lang="ko-KR" altLang="en-US"/>
           </a:p>
@@ -1961,7 +1961,7 @@
           <a:p>
             <a:fld id="{32DD6007-6A42-4C9B-B218-6A32B3A38C67}" type="datetime1">
               <a:rPr lang="ko-KR" altLang="en-US" smtClean="0"/>
-              <a:t>2026-07-27</a:t>
+              <a:t>2026-07-29</a:t>
             </a:fld>
             <a:endParaRPr lang="ko-KR" altLang="en-US"/>
           </a:p>
@@ -2373,7 +2373,7 @@
           <a:p>
             <a:fld id="{F66658DF-8B5F-4351-A42C-BF3495DE7ABE}" type="datetime1">
               <a:rPr lang="ko-KR" altLang="en-US" smtClean="0"/>
-              <a:t>2026-07-27</a:t>
+              <a:t>2026-07-29</a:t>
             </a:fld>
             <a:endParaRPr lang="ko-KR" altLang="en-US"/>
           </a:p>
@@ -2514,7 +2514,7 @@
           <a:p>
             <a:fld id="{74359C48-8150-4FAB-8BEF-6AD61CFC9BBE}" type="datetime1">
               <a:rPr lang="ko-KR" altLang="en-US" smtClean="0"/>
-              <a:t>2026-07-27</a:t>
+              <a:t>2026-07-29</a:t>
             </a:fld>
             <a:endParaRPr lang="ko-KR" altLang="en-US"/>
           </a:p>
@@ -2627,7 +2627,7 @@
           <a:p>
             <a:fld id="{2D41DBCF-1091-470D-AC72-5CF3D00280AC}" type="datetime1">
               <a:rPr lang="ko-KR" altLang="en-US" smtClean="0"/>
-              <a:t>2026-07-27</a:t>
+              <a:t>2026-07-29</a:t>
             </a:fld>
             <a:endParaRPr lang="ko-KR" altLang="en-US"/>
           </a:p>
@@ -2938,7 +2938,7 @@
           <a:p>
             <a:fld id="{4024AE7C-57FB-4DBB-B90C-59145D637BF6}" type="datetime1">
               <a:rPr lang="ko-KR" altLang="en-US" smtClean="0"/>
-              <a:t>2026-07-27</a:t>
+              <a:t>2026-07-29</a:t>
             </a:fld>
             <a:endParaRPr lang="ko-KR" altLang="en-US"/>
           </a:p>
@@ -3226,7 +3226,7 @@
           <a:p>
             <a:fld id="{17D92253-43A0-46E3-918E-3929407A8C01}" type="datetime1">
               <a:rPr lang="ko-KR" altLang="en-US" smtClean="0"/>
-              <a:t>2026-07-27</a:t>
+              <a:t>2026-07-29</a:t>
             </a:fld>
             <a:endParaRPr lang="ko-KR" altLang="en-US"/>
           </a:p>
@@ -3467,7 +3467,7 @@
           <a:p>
             <a:fld id="{75D61A29-800E-482A-B0FD-5A04401ECD92}" type="datetime1">
               <a:rPr lang="ko-KR" altLang="en-US" smtClean="0"/>
-              <a:t>2026-07-27</a:t>
+              <a:t>2026-07-29</a:t>
             </a:fld>
             <a:endParaRPr lang="ko-KR" altLang="en-US"/>
           </a:p>
